--- a/docs/webinar/E2E-5/E2E-5-ficha.pptx
+++ b/docs/webinar/E2E-5/E2E-5-ficha.pptx
@@ -108,7 +108,7 @@
   <p:extLst>
     <p:ext uri="{521415D9-36F7-43E2-AB2F-B90AF26B5E84}">
       <p14:sectionLst xmlns:p14="http://schemas.microsoft.com/office/powerpoint/2010/main">
-        <p14:section name="Ficha del taller" id="{c6c3bacb-46f8-b424-5b07-7dc8eecb554d}">
+        <p14:section name="Ficha del taller" id="{3c8c2e09-a0fe-b4d7-8c50-84a8cb0b7a75}">
           <p14:sldIdLst>
             <p14:sldId id="256"/>
             <p14:sldId id="257"/>
@@ -862,7 +862,7 @@
                   <a:srgbClr val="696969"/>
                 </a:solidFill>
               </a:rPr>
-              <a:t>pm-method 2.4.0 · Webinar E2E-5 · Ficha del taller</a:t>
+              <a:t>pm-method 2.5.0 · Webinar E2E-5 · Ficha del taller</a:t>
             </a:r>
             <a:endParaRPr lang="en-US" sz="1000" dirty="0"/>
           </a:p>
@@ -1102,7 +1102,7 @@
                   <a:srgbClr val="696969"/>
                 </a:solidFill>
               </a:rPr>
-              <a:t>pm-method 2.4.0 · Webinar E2E-5 · Ficha del taller</a:t>
+              <a:t>pm-method 2.5.0 · Webinar E2E-5 · Ficha del taller</a:t>
             </a:r>
             <a:endParaRPr lang="en-US" sz="1000" dirty="0"/>
           </a:p>
@@ -1535,7 +1535,7 @@
                 <a:ea typeface="Arial" pitchFamily="34" charset="-122"/>
                 <a:cs typeface="Arial" pitchFamily="34" charset="-120"/>
               </a:rPr>
-              <a:t>Taller · 2 clases de 90 minutos · Webinar pm-method 2.4.0 · E2E-5</a:t>
+              <a:t>Taller · 2 clases de 90 minutos · Webinar pm-method 2.5.0 · E2E-5</a:t>
             </a:r>
             <a:endParaRPr lang="en-US" sz="1400" dirty="0"/>
           </a:p>

--- a/docs/webinar/E2E-5/E2E-5-ficha.pptx
+++ b/docs/webinar/E2E-5/E2E-5-ficha.pptx
@@ -108,7 +108,7 @@
   <p:extLst>
     <p:ext uri="{521415D9-36F7-43E2-AB2F-B90AF26B5E84}">
       <p14:sectionLst xmlns:p14="http://schemas.microsoft.com/office/powerpoint/2010/main">
-        <p14:section name="Ficha del taller" id="{3c8c2e09-a0fe-b4d7-8c50-84a8cb0b7a75}">
+        <p14:section name="Ficha del taller" id="{f35bb6d0-efa2-662f-83d5-ea75a34d1c51}">
           <p14:sldIdLst>
             <p14:sldId id="256"/>
             <p14:sldId id="257"/>
@@ -862,7 +862,7 @@
                   <a:srgbClr val="696969"/>
                 </a:solidFill>
               </a:rPr>
-              <a:t>pm-method 2.5.0 · Webinar E2E-5 · Ficha del taller</a:t>
+              <a:t>pm-method 2.5.1 · Webinar E2E-5 · Ficha del taller</a:t>
             </a:r>
             <a:endParaRPr lang="en-US" sz="1000" dirty="0"/>
           </a:p>
@@ -1102,7 +1102,7 @@
                   <a:srgbClr val="696969"/>
                 </a:solidFill>
               </a:rPr>
-              <a:t>pm-method 2.5.0 · Webinar E2E-5 · Ficha del taller</a:t>
+              <a:t>pm-method 2.5.1 · Webinar E2E-5 · Ficha del taller</a:t>
             </a:r>
             <a:endParaRPr lang="en-US" sz="1000" dirty="0"/>
           </a:p>
@@ -1535,7 +1535,7 @@
                 <a:ea typeface="Arial" pitchFamily="34" charset="-122"/>
                 <a:cs typeface="Arial" pitchFamily="34" charset="-120"/>
               </a:rPr>
-              <a:t>Taller · 2 clases de 90 minutos · Webinar pm-method 2.5.0 · E2E-5</a:t>
+              <a:t>Taller · 2 clases de 90 minutos · Webinar pm-method 2.5.1 · E2E-5</a:t>
             </a:r>
             <a:endParaRPr lang="en-US" sz="1400" dirty="0"/>
           </a:p>
@@ -1969,7 +1969,7 @@
                 <a:ea typeface="Arial" pitchFamily="34" charset="-122"/>
                 <a:cs typeface="Arial" pitchFamily="34" charset="-120"/>
               </a:rPr>
-              <a:t>Comparar opciones contra no hacer nada con VAN, TIR, repago y punto de equilibrio</a:t>
+              <a:t>Comparar opciones contra no hacer nada con VAN, TIR, repago y una matriz de pesos explícitos</a:t>
             </a:r>
             <a:endParaRPr lang="en-US" sz="1600" dirty="0"/>
           </a:p>
@@ -2858,7 +2858,7 @@
                 <a:ea typeface="Arial" pitchFamily="34" charset="-122"/>
                 <a:cs typeface="Arial" pitchFamily="34" charset="-120"/>
               </a:rPr>
-              <a:t>Calcula VAN, TIR, repago y sensibilidad desde los flujos de cada opción</a:t>
+              <a:t>Calcula VAN, TIR y repago y compara opciones con pesos explícitos y su sensibilidad</a:t>
             </a:r>
             <a:endParaRPr lang="en-US" sz="1600" dirty="0"/>
           </a:p>
@@ -3664,7 +3664,7 @@
                 <a:ea typeface="Arial" pitchFamily="34" charset="-122"/>
                 <a:cs typeface="Arial" pitchFamily="34" charset="-120"/>
               </a:rPr>
-              <a:t>Opciones de negocio con VAN, TIR y repago</a:t>
+              <a:t>Opciones de negocio con VAN y matriz de decisión</a:t>
             </a:r>
             <a:endParaRPr lang="en-US" sz="1600" dirty="0"/>
           </a:p>
